--- a/docs/pitch_deck_aura2.pptx
+++ b/docs/pitch_deck_aura2.pptx
@@ -125,7 +125,7 @@
           <a:lstStyle/>
           <a:p>
             <a:r>
-              <a:t>Concentração de receita — corte Top 10% captura 46,97%</a:t>
+              <a:t>Concentração de receita — corte Top 10% captura 46,96%</a:t>
             </a:r>
           </a:p>
         </c:rich>
@@ -182,7 +182,7 @@
                   <c:v>0.3049</c:v>
                 </c:pt>
                 <c:pt idx="1">
-                  <c:v>0.4697</c:v>
+                  <c:v>0.4696</c:v>
                 </c:pt>
                 <c:pt idx="2">
                   <c:v>0.5739</c:v>
@@ -307,13 +307,13 @@
                 <c:formatCode>General</c:formatCode>
                 <c:ptCount val="3"/>
                 <c:pt idx="0">
-                  <c:v>-163.2</c:v>
+                  <c:v>-163.4</c:v>
                 </c:pt>
                 <c:pt idx="1">
-                  <c:v>-153.5</c:v>
+                  <c:v>-153.7</c:v>
                 </c:pt>
                 <c:pt idx="2">
-                  <c:v>-132.8</c:v>
+                  <c:v>-132.9</c:v>
                 </c:pt>
               </c:numCache>
             </c:numRef>
@@ -4182,7 +4182,7 @@
                 </a:solidFill>
                 <a:latin typeface="Calibri"/>
               </a:rPr>
-              <a:t>• Churn: ROC-AUC 0,857 · PR-AUC 0,837 · Brier 0,145</a:t>
+              <a:t>• Churn: ROC-AUC 0,857 · PR-AUC 0,852 · Brier 0,145</a:t>
             </a:r>
           </a:p>
           <a:p>
@@ -4259,7 +4259,7 @@
                 </a:solidFill>
                 <a:latin typeface="Calibri"/>
               </a:rPr>
-              <a:t>Corte alto-valor: 5.005 clientes (10,01%). Validade: métricas computadas na base sintética com validação temporal.</a:t>
+              <a:t>Corte alto-valor: 5.005 clientes (10,01% da carteira) capturando 46,96% da receita. Validade: métricas computadas na base sintética com validação temporal.</a:t>
             </a:r>
           </a:p>
         </p:txBody>
@@ -4422,7 +4422,7 @@
                 </a:solidFill>
                 <a:latin typeface="Calibri"/>
               </a:rPr>
-              <a:t>• CLV previsto R$ 3.869 · churn 76,4% · VaR R$ 2.956</a:t>
+              <a:t>• CLV previsto R$ 4.975 · churn 62,5% · VaR R$ 3.109</a:t>
             </a:r>
           </a:p>
           <a:p>
@@ -4482,7 +4482,7 @@
                 </a:solidFill>
                 <a:latin typeface="Calibri"/>
               </a:rPr>
-              <a:t>• Latência média 32 ms/cliente · custo R$ 0 (offline)</a:t>
+              <a:t>• Latência média 33 ms/cliente · custo R$ 0 (offline)</a:t>
             </a:r>
           </a:p>
         </p:txBody>
@@ -4576,7 +4576,7 @@
                 </a:solidFill>
                 <a:latin typeface="Calibri"/>
               </a:rPr>
-              <a:t>groundedness das citações (171 clientes reais)</a:t>
+              <a:t>groundedness das citações (170 clientes reais)</a:t>
             </a:r>
           </a:p>
         </p:txBody>
@@ -4658,7 +4658,7 @@
                 </a:solidFill>
                 <a:latin typeface="Calibri"/>
               </a:rPr>
-              <a:t>46,2%</a:t>
+              <a:t>44,7%</a:t>
             </a:r>
           </a:p>
           <a:p>
@@ -4856,7 +4856,7 @@
                 </a:solidFill>
                 <a:latin typeface="Calibri"/>
               </a:rPr>
-              <a:t>Campanha generalista sobre 14.638 alvos é DEFICITÁRIA em todos os cenários —</a:t>
+              <a:t>Campanha generalista sobre 14.645 alvos é DEFICITÁRIA em todos os cenários —</a:t>
             </a:r>
           </a:p>
           <a:p>
@@ -4868,7 +4868,7 @@
                 </a:solidFill>
                 <a:latin typeface="Calibri"/>
               </a:rPr>
-              <a:t>o custo por ação (R$5–R$45) excede o retorno esperado em clientes de baixo valor em risco.</a:t>
+              <a:t>o custo por ação (R$3–R$60) excede o retorno esperado em clientes de baixo valor em risco.</a:t>
             </a:r>
           </a:p>
           <a:p>
@@ -4904,7 +4904,7 @@
                 </a:solidFill>
                 <a:latin typeface="Calibri"/>
               </a:rPr>
-              <a:t>• Priorização por VaR: R$ 80k cobrem 6.170 clientes e 59% do risco</a:t>
+              <a:t>• Priorização por VaR: R$ 80k cobrem 6.140 clientes e 58,9% do risco</a:t>
             </a:r>
           </a:p>
           <a:p>
@@ -4916,7 +4916,7 @@
                 </a:solidFill>
                 <a:latin typeface="Calibri"/>
               </a:rPr>
-              <a:t>• Piloto A/B (poder 80%, α 5%): n = 4.618/braço para detectar +2pp de retenção</a:t>
+              <a:t>• Piloto A/B (poder 80%, α 5%): n = 4.624/braço para detectar +2pp de retenção</a:t>
             </a:r>
           </a:p>
           <a:p>
@@ -5192,7 +5192,7 @@
                 </a:solidFill>
                 <a:latin typeface="Calibri"/>
               </a:rPr>
-              <a:t>• 189 testes automatizados verdes · 12 revisões independentes documentadas com veredito assinado</a:t>
+              <a:t>• 190 testes automatizados verdes · 12 revisões independentes documentadas com veredito assinado</a:t>
             </a:r>
           </a:p>
         </p:txBody>
@@ -5496,7 +5496,7 @@
                 </a:solidFill>
                 <a:latin typeface="Calibri"/>
               </a:rPr>
-              <a:t>189</a:t>
+              <a:t>190</a:t>
             </a:r>
           </a:p>
           <a:p>
@@ -5847,7 +5847,7 @@
                 </a:solidFill>
                 <a:latin typeface="Calibri"/>
               </a:rPr>
-              <a:t>Projeto Aura 2.0 · Entrega com evidências executadas — 12 revisões independentes, 189 testes, zero número inventado.</a:t>
+              <a:t>Projeto Aura 2.0 · Entrega com evidências executadas — 12 revisões independentes, 190 testes, zero número inventado.</a:t>
             </a:r>
           </a:p>
         </p:txBody>
